--- a/public/pitch/MyFlove_Investor_Pitch_3min_EN.pptx
+++ b/public/pitch/MyFlove_Investor_Pitch_3min_EN.pptx
@@ -17,6 +17,7 @@
     <p:sldId id="265" r:id="rId17"/>
     <p:sldId id="266" r:id="rId18"/>
     <p:sldId id="267" r:id="rId19"/>
+    <p:sldId id="268" r:id="rId20"/>
   </p:sldIdLst>
   <p:sldSz cx="12192000" cy="6858000" type="screen4x3"/>
   <p:notesSz cx="6858000" cy="9144000"/>
@@ -5943,6 +5944,229 @@
                 <a:latin typeface="Nunito Sans"/>
               </a:rPr>
               <a:t>MyFlove · myflove.lovable.app</a:t>
+            </a:r>
+          </a:p>
+        </p:txBody>
+      </p:sp>
+    </p:spTree>
+  </p:cSld>
+  <p:clrMapOvr>
+    <a:masterClrMapping/>
+  </p:clrMapOvr>
+</p:sld>
+</file>
+
+<file path=ppt/slides/slide13.xml><?xml version="1.0" encoding="utf-8"?>
+<p:sld xmlns:a="http://schemas.openxmlformats.org/drawingml/2006/main" xmlns:p="http://schemas.openxmlformats.org/presentationml/2006/main" xmlns:r="http://schemas.openxmlformats.org/officeDocument/2006/relationships">
+  <p:cSld>
+    <p:spTree>
+      <p:nvGrpSpPr>
+        <p:cNvPr id="1" name=""/>
+        <p:cNvGrpSpPr/>
+        <p:nvPr/>
+      </p:nvGrpSpPr>
+      <p:grpSpPr/>
+      <p:sp>
+        <p:nvSpPr>
+          <p:cNvPr id="2" name="Rectangle 1"/>
+          <p:cNvSpPr/>
+          <p:nvPr/>
+        </p:nvSpPr>
+        <p:spPr>
+          <a:xfrm>
+            <a:off x="0" y="0"/>
+            <a:ext cx="12192000" cy="6858000"/>
+          </a:xfrm>
+          <a:prstGeom prst="rect">
+            <a:avLst/>
+          </a:prstGeom>
+          <a:solidFill>
+            <a:srgbClr val="FBF2F8"/>
+          </a:solidFill>
+          <a:ln>
+            <a:noFill/>
+          </a:ln>
+        </p:spPr>
+        <p:style>
+          <a:lnRef idx="1">
+            <a:schemeClr val="accent1"/>
+          </a:lnRef>
+          <a:fillRef idx="3">
+            <a:schemeClr val="accent1"/>
+          </a:fillRef>
+          <a:effectRef idx="2">
+            <a:schemeClr val="accent1"/>
+          </a:effectRef>
+          <a:fontRef idx="minor">
+            <a:schemeClr val="lt1"/>
+          </a:fontRef>
+        </p:style>
+        <p:txBody>
+          <a:bodyPr rtlCol="0" anchor="ctr"/>
+          <a:lstStyle/>
+          <a:p>
+            <a:pPr algn="ctr"/>
+          </a:p>
+        </p:txBody>
+      </p:sp>
+      <p:sp>
+        <p:nvSpPr>
+          <p:cNvPr id="3" name="TextBox 2"/>
+          <p:cNvSpPr txBox="1"/>
+          <p:nvPr/>
+        </p:nvSpPr>
+        <p:spPr>
+          <a:xfrm>
+            <a:off x="731520" y="480060"/>
+            <a:ext cx="10728960" cy="1371600"/>
+          </a:xfrm>
+          <a:prstGeom prst="rect">
+            <a:avLst/>
+          </a:prstGeom>
+          <a:noFill/>
+        </p:spPr>
+        <p:txBody>
+          <a:bodyPr wrap="square">
+            <a:spAutoFit/>
+          </a:bodyPr>
+          <a:lstStyle/>
+          <a:p>
+            <a:r>
+              <a:rPr sz="4000" b="1">
+                <a:solidFill>
+                  <a:srgbClr val="3A2D50"/>
+                </a:solidFill>
+                <a:latin typeface="Calibri"/>
+              </a:rPr>
+              <a:t>Live product demo — 20 seconds</a:t>
+            </a:r>
+          </a:p>
+          <a:p>
+            <a:r>
+              <a:rPr sz="2000">
+                <a:solidFill>
+                  <a:srgbClr val="695C82"/>
+                </a:solidFill>
+                <a:latin typeface="Calibri"/>
+              </a:rPr>
+              <a:t>QuickFlow  →  Flow  →  My Day. Real screens from the live app.</a:t>
+            </a:r>
+          </a:p>
+        </p:txBody>
+      </p:sp>
+      <p:pic>
+        <p:nvPicPr>
+          <p:cNvPr id="4" name="Picture 3" descr="myflove-demo-quickflow.jpg"/>
+          <p:cNvPicPr>
+            <a:picLocks noChangeAspect="1"/>
+          </p:cNvPicPr>
+          <p:nvPr/>
+        </p:nvPicPr>
+        <p:blipFill>
+          <a:blip r:embed="rId2"/>
+          <a:stretch>
+            <a:fillRect/>
+          </a:stretch>
+        </p:blipFill>
+        <p:spPr>
+          <a:xfrm>
+            <a:off x="731520" y="2331720"/>
+            <a:ext cx="3413760" cy="1920240"/>
+          </a:xfrm>
+          <a:prstGeom prst="rect">
+            <a:avLst/>
+          </a:prstGeom>
+        </p:spPr>
+      </p:pic>
+      <p:pic>
+        <p:nvPicPr>
+          <p:cNvPr id="5" name="Picture 4" descr="myflove-demo-flow.jpg"/>
+          <p:cNvPicPr>
+            <a:picLocks noChangeAspect="1"/>
+          </p:cNvPicPr>
+          <p:nvPr/>
+        </p:nvPicPr>
+        <p:blipFill>
+          <a:blip r:embed="rId3"/>
+          <a:stretch>
+            <a:fillRect/>
+          </a:stretch>
+        </p:blipFill>
+        <p:spPr>
+          <a:xfrm>
+            <a:off x="4389120" y="2331720"/>
+            <a:ext cx="3413760" cy="1920240"/>
+          </a:xfrm>
+          <a:prstGeom prst="rect">
+            <a:avLst/>
+          </a:prstGeom>
+        </p:spPr>
+      </p:pic>
+      <p:pic>
+        <p:nvPicPr>
+          <p:cNvPr id="6" name="Picture 5" descr="myflove-demo-minday.jpg"/>
+          <p:cNvPicPr>
+            <a:picLocks noChangeAspect="1"/>
+          </p:cNvPicPr>
+          <p:nvPr/>
+        </p:nvPicPr>
+        <p:blipFill>
+          <a:blip r:embed="rId4"/>
+          <a:stretch>
+            <a:fillRect/>
+          </a:stretch>
+        </p:blipFill>
+        <p:spPr>
+          <a:xfrm>
+            <a:off x="8046720" y="2331720"/>
+            <a:ext cx="3413760" cy="1920240"/>
+          </a:xfrm>
+          <a:prstGeom prst="rect">
+            <a:avLst/>
+          </a:prstGeom>
+        </p:spPr>
+      </p:pic>
+      <p:sp>
+        <p:nvSpPr>
+          <p:cNvPr id="7" name="TextBox 6"/>
+          <p:cNvSpPr txBox="1"/>
+          <p:nvPr/>
+        </p:nvSpPr>
+        <p:spPr>
+          <a:xfrm>
+            <a:off x="731520" y="4457700"/>
+            <a:ext cx="10728960" cy="1371600"/>
+          </a:xfrm>
+          <a:prstGeom prst="rect">
+            <a:avLst/>
+          </a:prstGeom>
+          <a:noFill/>
+        </p:spPr>
+        <p:txBody>
+          <a:bodyPr wrap="square">
+            <a:spAutoFit/>
+          </a:bodyPr>
+          <a:lstStyle/>
+          <a:p>
+            <a:r>
+              <a:rPr sz="2600" b="1">
+                <a:solidFill>
+                  <a:srgbClr val="6E5AA6"/>
+                </a:solidFill>
+                <a:latin typeface="Calibri"/>
+              </a:rPr>
+              <a:t>“The goal isn’t to get more done. It’s to make the day more doable.”</a:t>
+            </a:r>
+          </a:p>
+          <a:p>
+            <a:r>
+              <a:rPr sz="1600">
+                <a:solidFill>
+                  <a:srgbClr val="695C82"/>
+                </a:solidFill>
+                <a:latin typeface="Calibri"/>
+              </a:rPr>
+              <a:t>Video file: myflove-demo-20s.mp4</a:t>
             </a:r>
           </a:p>
         </p:txBody>

--- a/public/pitch/MyFlove_Investor_Pitch_3min_EN.pptx
+++ b/public/pitch/MyFlove_Investor_Pitch_3min_EN.pptx
@@ -6038,7 +6038,7 @@
                 </a:solidFill>
                 <a:latin typeface="Calibri"/>
               </a:rPr>
-              <a:t>Live product demo — 20 seconds</a:t>
+              <a:t>Live product demo — 27 seconds</a:t>
             </a:r>
           </a:p>
           <a:p>
@@ -6049,14 +6049,59 @@
                 </a:solidFill>
                 <a:latin typeface="Calibri"/>
               </a:rPr>
-              <a:t>QuickFlow  →  Flow  →  My Day. Real screens from the live app.</a:t>
+              <a:t>QuickFlow → Flow → the plan adapts to capacity → My Day. Real screens from the live app.</a:t>
+            </a:r>
+          </a:p>
+        </p:txBody>
+      </p:sp>
+      <p:sp>
+        <p:nvSpPr>
+          <p:cNvPr id="7" name="TextBox 6"/>
+          <p:cNvSpPr txBox="1"/>
+          <p:nvPr/>
+        </p:nvSpPr>
+        <p:spPr>
+          <a:xfrm>
+            <a:off x="731520" y="4457700"/>
+            <a:ext cx="10728960" cy="1371600"/>
+          </a:xfrm>
+          <a:prstGeom prst="rect">
+            <a:avLst/>
+          </a:prstGeom>
+          <a:noFill/>
+        </p:spPr>
+        <p:txBody>
+          <a:bodyPr wrap="square">
+            <a:spAutoFit/>
+          </a:bodyPr>
+          <a:lstStyle/>
+          <a:p>
+            <a:r>
+              <a:rPr sz="2600" b="1">
+                <a:solidFill>
+                  <a:srgbClr val="6E5AA6"/>
+                </a:solidFill>
+                <a:latin typeface="Calibri"/>
+              </a:rPr>
+              <a:t>“The goal isn’t to get more done. It’s to make the day more doable.”</a:t>
+            </a:r>
+          </a:p>
+          <a:p>
+            <a:r>
+              <a:rPr sz="1600">
+                <a:solidFill>
+                  <a:srgbClr val="695C82"/>
+                </a:solidFill>
+                <a:latin typeface="Calibri"/>
+              </a:rPr>
+              <a:t>Video file: myflove-demo-20s.mp4  ·  27 s  ·  same tasks planned at high energy (4 h) vs low energy (30 min)</a:t>
             </a:r>
           </a:p>
         </p:txBody>
       </p:sp>
       <p:pic>
         <p:nvPicPr>
-          <p:cNvPr id="4" name="Picture 3" descr="myflove-demo-quickflow.jpg"/>
+          <p:cNvPr id="8" name="Picture 7" descr="image.jpg"/>
           <p:cNvPicPr>
             <a:picLocks noChangeAspect="1"/>
           </p:cNvPicPr>
@@ -6070,8 +6115,8 @@
         </p:blipFill>
         <p:spPr>
           <a:xfrm>
-            <a:off x="731520" y="2331720"/>
-            <a:ext cx="3413760" cy="1920240"/>
+            <a:off x="731520" y="2500000"/>
+            <a:ext cx="2017792" cy="1135008"/>
           </a:xfrm>
           <a:prstGeom prst="rect">
             <a:avLst/>
@@ -6080,7 +6125,7 @@
       </p:pic>
       <p:pic>
         <p:nvPicPr>
-          <p:cNvPr id="5" name="Picture 4" descr="myflove-demo-flow.jpg"/>
+          <p:cNvPr id="9" name="Picture 8" descr="image.jpg"/>
           <p:cNvPicPr>
             <a:picLocks noChangeAspect="1"/>
           </p:cNvPicPr>
@@ -6094,8 +6139,8 @@
         </p:blipFill>
         <p:spPr>
           <a:xfrm>
-            <a:off x="4389120" y="2331720"/>
-            <a:ext cx="3413760" cy="1920240"/>
+            <a:off x="2909312" y="2500000"/>
+            <a:ext cx="2017792" cy="1135008"/>
           </a:xfrm>
           <a:prstGeom prst="rect">
             <a:avLst/>
@@ -6104,7 +6149,55 @@
       </p:pic>
       <p:pic>
         <p:nvPicPr>
-          <p:cNvPr id="6" name="Picture 5" descr="myflove-demo-minday.jpg"/>
+          <p:cNvPr id="10" name="Picture 9" descr="myflove-demo-adapt-a.jpg"/>
+          <p:cNvPicPr>
+            <a:picLocks noChangeAspect="1"/>
+          </p:cNvPicPr>
+          <p:nvPr/>
+        </p:nvPicPr>
+        <p:blipFill>
+          <a:blip r:embed="rId5"/>
+          <a:stretch>
+            <a:fillRect/>
+          </a:stretch>
+        </p:blipFill>
+        <p:spPr>
+          <a:xfrm>
+            <a:off x="5087104" y="2500000"/>
+            <a:ext cx="2017792" cy="1135008"/>
+          </a:xfrm>
+          <a:prstGeom prst="rect">
+            <a:avLst/>
+          </a:prstGeom>
+        </p:spPr>
+      </p:pic>
+      <p:pic>
+        <p:nvPicPr>
+          <p:cNvPr id="11" name="Picture 10" descr="myflove-demo-adapt-b.jpg"/>
+          <p:cNvPicPr>
+            <a:picLocks noChangeAspect="1"/>
+          </p:cNvPicPr>
+          <p:nvPr/>
+        </p:nvPicPr>
+        <p:blipFill>
+          <a:blip r:embed="rId6"/>
+          <a:stretch>
+            <a:fillRect/>
+          </a:stretch>
+        </p:blipFill>
+        <p:spPr>
+          <a:xfrm>
+            <a:off x="7264896" y="2500000"/>
+            <a:ext cx="2017792" cy="1135008"/>
+          </a:xfrm>
+          <a:prstGeom prst="rect">
+            <a:avLst/>
+          </a:prstGeom>
+        </p:spPr>
+      </p:pic>
+      <p:pic>
+        <p:nvPicPr>
+          <p:cNvPr id="12" name="Picture 11" descr="image.jpg"/>
           <p:cNvPicPr>
             <a:picLocks noChangeAspect="1"/>
           </p:cNvPicPr>
@@ -6118,59 +6211,14 @@
         </p:blipFill>
         <p:spPr>
           <a:xfrm>
-            <a:off x="8046720" y="2331720"/>
-            <a:ext cx="3413760" cy="1920240"/>
+            <a:off x="9442688" y="2500000"/>
+            <a:ext cx="2017792" cy="1135008"/>
           </a:xfrm>
           <a:prstGeom prst="rect">
             <a:avLst/>
           </a:prstGeom>
         </p:spPr>
       </p:pic>
-      <p:sp>
-        <p:nvSpPr>
-          <p:cNvPr id="7" name="TextBox 6"/>
-          <p:cNvSpPr txBox="1"/>
-          <p:nvPr/>
-        </p:nvSpPr>
-        <p:spPr>
-          <a:xfrm>
-            <a:off x="731520" y="4457700"/>
-            <a:ext cx="10728960" cy="1371600"/>
-          </a:xfrm>
-          <a:prstGeom prst="rect">
-            <a:avLst/>
-          </a:prstGeom>
-          <a:noFill/>
-        </p:spPr>
-        <p:txBody>
-          <a:bodyPr wrap="square">
-            <a:spAutoFit/>
-          </a:bodyPr>
-          <a:lstStyle/>
-          <a:p>
-            <a:r>
-              <a:rPr sz="2600" b="1">
-                <a:solidFill>
-                  <a:srgbClr val="6E5AA6"/>
-                </a:solidFill>
-                <a:latin typeface="Calibri"/>
-              </a:rPr>
-              <a:t>“The goal isn’t to get more done. It’s to make the day more doable.”</a:t>
-            </a:r>
-          </a:p>
-          <a:p>
-            <a:r>
-              <a:rPr sz="1600">
-                <a:solidFill>
-                  <a:srgbClr val="695C82"/>
-                </a:solidFill>
-                <a:latin typeface="Calibri"/>
-              </a:rPr>
-              <a:t>Video file: myflove-demo-20s.mp4</a:t>
-            </a:r>
-          </a:p>
-        </p:txBody>
-      </p:sp>
     </p:spTree>
   </p:cSld>
   <p:clrMapOvr>

--- a/public/pitch/MyFlove_Investor_Pitch_3min_EN.pptx
+++ b/public/pitch/MyFlove_Investor_Pitch_3min_EN.pptx
@@ -4349,8 +4349,8 @@
         </p:nvSpPr>
         <p:spPr>
           <a:xfrm>
-            <a:off x="7470648" y="521208"/>
-            <a:ext cx="4123944" cy="5038344"/>
+            <a:off x="7900416" y="521208"/>
+            <a:ext cx="3392424" cy="5038344"/>
           </a:xfrm>
           <a:prstGeom prst="roundRect">
             <a:avLst/>
@@ -4386,23 +4386,23 @@
       </p:sp>
       <p:pic>
         <p:nvPicPr>
-          <p:cNvPr id="4" name="Picture 3" descr="image.jpg"/>
+          <p:cNvPr id="4" name="Picture 3" descr="myflove-demo-minday-phone.jpg"/>
           <p:cNvPicPr>
             <a:picLocks noChangeAspect="1"/>
           </p:cNvPicPr>
           <p:nvPr/>
         </p:nvPicPr>
         <p:blipFill>
-          <a:blip r:embed="rId3"/>
-          <a:srcRect l="27132" r="27132"/>
+          <a:blip r:embed="rId4"/>
+          <a:srcRect t="4940" b="4940"/>
           <a:stretch>
             <a:fillRect/>
           </a:stretch>
         </p:blipFill>
         <p:spPr>
           <a:xfrm>
-            <a:off x="7543800" y="594360"/>
-            <a:ext cx="3977639" cy="4892040"/>
+            <a:off x="7973568" y="594360"/>
+            <a:ext cx="3246120" cy="4892040"/>
           </a:xfrm>
           <a:prstGeom prst="rect">
             <a:avLst/>
@@ -5998,8 +5998,8 @@
         </p:nvSpPr>
         <p:spPr>
           <a:xfrm>
-            <a:off x="7379208" y="493776"/>
-            <a:ext cx="4215384" cy="5312664"/>
+            <a:off x="7836408" y="493776"/>
+            <a:ext cx="3547872" cy="5312664"/>
           </a:xfrm>
           <a:prstGeom prst="roundRect">
             <a:avLst/>
@@ -6035,23 +6035,23 @@
       </p:sp>
       <p:pic>
         <p:nvPicPr>
-          <p:cNvPr id="3" name="Picture 2" descr="image.jpg"/>
+          <p:cNvPr id="3" name="Picture 2" descr="myflove-demo-minday-phone.jpg"/>
           <p:cNvPicPr>
             <a:picLocks noChangeAspect="1"/>
           </p:cNvPicPr>
           <p:nvPr/>
         </p:nvPicPr>
         <p:blipFill>
-          <a:blip r:embed="rId3"/>
-          <a:srcRect l="27848" r="27848"/>
+          <a:blip r:embed="rId4"/>
+          <a:srcRect t="4588" b="4588"/>
           <a:stretch>
             <a:fillRect/>
           </a:stretch>
         </p:blipFill>
         <p:spPr>
           <a:xfrm>
-            <a:off x="7452360" y="566928"/>
-            <a:ext cx="4069080" cy="5166360"/>
+            <a:off x="7909560" y="566928"/>
+            <a:ext cx="3401568" cy="5166360"/>
           </a:xfrm>
           <a:prstGeom prst="rect">
             <a:avLst/>
@@ -7313,7 +7313,7 @@
       </p:sp>
       <p:pic>
         <p:nvPicPr>
-          <p:cNvPr id="6" name="Picture 5" descr="myflove-demo-20s-poster.jpg"/>
+          <p:cNvPr id="6" name="Picture 5" descr="image.jpg"/>
           <p:cNvPicPr>
             <a:picLocks noChangeAspect="1"/>
           </p:cNvPicPr>
@@ -9600,7 +9600,7 @@
       </p:sp>
       <p:pic>
         <p:nvPicPr>
-          <p:cNvPr id="10" name="Picture 9" descr="myflove-pitch-4.1-battery-thumb.jpg"/>
+          <p:cNvPr id="10" name="Picture 9" descr="image.jpg"/>
           <p:cNvPicPr>
             <a:picLocks noChangeAspect="1"/>
           </p:cNvPicPr>

--- a/public/pitch/MyFlove_Investor_Pitch_3min_EN.pptx
+++ b/public/pitch/MyFlove_Investor_Pitch_3min_EN.pptx
@@ -4386,7 +4386,7 @@
       </p:sp>
       <p:pic>
         <p:nvPicPr>
-          <p:cNvPr id="4" name="Picture 3" descr="myflove-demo-minday-phone.jpg"/>
+          <p:cNvPr id="4" name="Picture 3" descr="image.jpg"/>
           <p:cNvPicPr>
             <a:picLocks noChangeAspect="1"/>
           </p:cNvPicPr>
@@ -6035,7 +6035,7 @@
       </p:sp>
       <p:pic>
         <p:nvPicPr>
-          <p:cNvPr id="3" name="Picture 2" descr="myflove-demo-minday-phone.jpg"/>
+          <p:cNvPr id="3" name="Picture 2" descr="image.jpg"/>
           <p:cNvPicPr>
             <a:picLocks noChangeAspect="1"/>
           </p:cNvPicPr>
@@ -6676,15 +6676,15 @@
       </p:sp>
       <p:pic>
         <p:nvPicPr>
-          <p:cNvPr id="11" name="Picture 10" descr="image.jpg"/>
+          <p:cNvPr id="11" name="Picture 10" descr="adapt-high.jpg"/>
           <p:cNvPicPr>
             <a:picLocks noChangeAspect="1"/>
           </p:cNvPicPr>
           <p:nvPr/>
         </p:nvPicPr>
         <p:blipFill>
-          <a:blip r:embed="rId5"/>
-          <a:srcRect l="25025" r="25025"/>
+          <a:blip r:embed="rId7"/>
+          <a:srcRect t="6942" b="6942"/>
           <a:stretch>
             <a:fillRect/>
           </a:stretch>
@@ -6780,15 +6780,15 @@
       </p:sp>
       <p:pic>
         <p:nvPicPr>
-          <p:cNvPr id="14" name="Picture 13" descr="image.jpg"/>
+          <p:cNvPr id="14" name="Picture 13" descr="adapt-low.jpg"/>
           <p:cNvPicPr>
             <a:picLocks noChangeAspect="1"/>
           </p:cNvPicPr>
           <p:nvPr/>
         </p:nvPicPr>
         <p:blipFill>
-          <a:blip r:embed="rId6"/>
-          <a:srcRect l="25025" r="25025"/>
+          <a:blip r:embed="rId8"/>
+          <a:srcRect t="6942" b="6942"/>
           <a:stretch>
             <a:fillRect/>
           </a:stretch>
@@ -11290,8 +11290,8 @@
         </p:nvSpPr>
         <p:spPr>
           <a:xfrm>
-            <a:off x="5504688" y="521208"/>
-            <a:ext cx="6044184" cy="4581144"/>
+            <a:off x="7040880" y="521208"/>
+            <a:ext cx="3026664" cy="4581144"/>
           </a:xfrm>
           <a:prstGeom prst="roundRect">
             <a:avLst/>
@@ -11327,23 +11327,23 @@
       </p:sp>
       <p:pic>
         <p:nvPicPr>
-          <p:cNvPr id="10" name="Picture 9" descr="image.jpg"/>
+          <p:cNvPr id="10" name="Picture 9" descr="myflove-demo-flow-phone.jpg"/>
           <p:cNvPicPr>
             <a:picLocks noChangeAspect="1"/>
           </p:cNvPicPr>
           <p:nvPr/>
         </p:nvPicPr>
         <p:blipFill>
-          <a:blip r:embed="rId3"/>
-          <a:srcRect l="12597" r="12597"/>
+          <a:blip r:embed="rId4"/>
+          <a:srcRect t="3964" b="3964"/>
           <a:stretch>
             <a:fillRect/>
           </a:stretch>
         </p:blipFill>
         <p:spPr>
           <a:xfrm>
-            <a:off x="5577840" y="594360"/>
-            <a:ext cx="5897880" cy="4434840"/>
+            <a:off x="7114032" y="594360"/>
+            <a:ext cx="2880360" cy="4434840"/>
           </a:xfrm>
           <a:prstGeom prst="rect">
             <a:avLst/>

--- a/public/pitch/MyFlove_Investor_Pitch_3min_EN.pptx
+++ b/public/pitch/MyFlove_Investor_Pitch_3min_EN.pptx
@@ -18,6 +18,7 @@
     <p:sldId id="266" r:id="rId18"/>
     <p:sldId id="267" r:id="rId19"/>
     <p:sldId id="268" r:id="rId20"/>
+    <p:sldId id="269" r:id="rId21"/>
   </p:sldIdLst>
   <p:sldSz cx="12192000" cy="6858000" type="screen4x3"/>
   <p:notesSz cx="6858000" cy="9144000"/>
@@ -7053,7 +7054,7 @@
               </a:defRPr>
             </a:pPr>
             <a:r>
-              <a:t>Video file: myflove-demo-20s.mp4 · 27 s · nothing changes until the user approves</a:t>
+              <a:t>Video file: myflove-demo-20s.mp4 · 27 s · Flow acts only after the user approves</a:t>
             </a:r>
           </a:p>
         </p:txBody>
@@ -7126,6 +7127,387 @@
             </a:pPr>
             <a:r>
               <a:t>13</a:t>
+            </a:r>
+          </a:p>
+        </p:txBody>
+      </p:sp>
+    </p:spTree>
+  </p:cSld>
+  <p:clrMapOvr>
+    <a:masterClrMapping/>
+  </p:clrMapOvr>
+</p:sld>
+</file>
+
+<file path=ppt/slides/slide14.xml><?xml version="1.0" encoding="utf-8"?>
+<p:sld xmlns:a="http://schemas.openxmlformats.org/drawingml/2006/main" xmlns:p="http://schemas.openxmlformats.org/presentationml/2006/main" xmlns:r="http://schemas.openxmlformats.org/officeDocument/2006/relationships">
+  <p:cSld>
+    <p:bg>
+      <p:bgPr>
+        <a:solidFill>
+          <a:srgbClr val="F7F4FC"/>
+        </a:solidFill>
+        <a:effectLst/>
+      </p:bgPr>
+    </p:bg>
+    <p:spTree>
+      <p:nvGrpSpPr>
+        <p:cNvPr id="1" name=""/>
+        <p:cNvGrpSpPr/>
+        <p:nvPr/>
+      </p:nvGrpSpPr>
+      <p:grpSpPr/>
+      <p:sp>
+        <p:nvSpPr>
+          <p:cNvPr id="2" name="Rectangle 1"/>
+          <p:cNvSpPr/>
+          <p:nvPr/>
+        </p:nvSpPr>
+        <p:spPr>
+          <a:xfrm>
+            <a:off x="0" y="0"/>
+            <a:ext cx="256032" cy="6858000"/>
+          </a:xfrm>
+          <a:prstGeom prst="rect">
+            <a:avLst/>
+          </a:prstGeom>
+          <a:solidFill>
+            <a:srgbClr val="855BC4"/>
+          </a:solidFill>
+          <a:ln>
+            <a:noFill/>
+          </a:ln>
+        </p:spPr>
+        <p:style>
+          <a:lnRef idx="1">
+            <a:schemeClr val="accent1"/>
+          </a:lnRef>
+          <a:fillRef idx="3">
+            <a:schemeClr val="accent1"/>
+          </a:fillRef>
+          <a:effectRef idx="2">
+            <a:schemeClr val="accent1"/>
+          </a:effectRef>
+          <a:fontRef idx="minor">
+            <a:schemeClr val="lt1"/>
+          </a:fontRef>
+        </p:style>
+        <p:txBody>
+          <a:bodyPr rtlCol="0" anchor="ctr"/>
+          <a:lstStyle/>
+          <a:p>
+            <a:pPr algn="ctr"/>
+          </a:p>
+        </p:txBody>
+      </p:sp>
+      <p:sp>
+        <p:nvSpPr>
+          <p:cNvPr id="3" name="TextBox 2"/>
+          <p:cNvSpPr txBox="1"/>
+          <p:nvPr/>
+        </p:nvSpPr>
+        <p:spPr>
+          <a:xfrm>
+            <a:off x="685800" y="502920"/>
+            <a:ext cx="10789920" cy="365760"/>
+          </a:xfrm>
+          <a:prstGeom prst="rect">
+            <a:avLst/>
+          </a:prstGeom>
+          <a:noFill/>
+        </p:spPr>
+        <p:txBody>
+          <a:bodyPr wrap="none">
+            <a:spAutoFit/>
+          </a:bodyPr>
+          <a:lstStyle/>
+          <a:p>
+            <a:pPr>
+              <a:defRPr sz="1200" b="1">
+                <a:solidFill>
+                  <a:srgbClr val="855BC4"/>
+                </a:solidFill>
+                <a:latin typeface="Arial"/>
+              </a:defRPr>
+            </a:pPr>
+            <a:r>
+              <a:t>MYFLOVE 5.0 · RELEASE 2026-09-11</a:t>
+            </a:r>
+          </a:p>
+        </p:txBody>
+      </p:sp>
+      <p:sp>
+        <p:nvSpPr>
+          <p:cNvPr id="4" name="TextBox 3"/>
+          <p:cNvSpPr txBox="1"/>
+          <p:nvPr/>
+        </p:nvSpPr>
+        <p:spPr>
+          <a:xfrm>
+            <a:off x="685800" y="960120"/>
+            <a:ext cx="10789920" cy="914400"/>
+          </a:xfrm>
+          <a:prstGeom prst="rect">
+            <a:avLst/>
+          </a:prstGeom>
+          <a:noFill/>
+        </p:spPr>
+        <p:txBody>
+          <a:bodyPr wrap="none">
+            <a:spAutoFit/>
+          </a:bodyPr>
+          <a:lstStyle/>
+          <a:p>
+            <a:pPr>
+              <a:defRPr sz="3400" b="1">
+                <a:solidFill>
+                  <a:srgbClr val="292042"/>
+                </a:solidFill>
+                <a:latin typeface="Arial"/>
+              </a:defRPr>
+            </a:pPr>
+            <a:r>
+              <a:t>MyFlove 5.0 — product readiness</a:t>
+            </a:r>
+          </a:p>
+        </p:txBody>
+      </p:sp>
+      <p:sp>
+        <p:nvSpPr>
+          <p:cNvPr id="5" name="TextBox 4"/>
+          <p:cNvSpPr txBox="1"/>
+          <p:nvPr/>
+        </p:nvSpPr>
+        <p:spPr>
+          <a:xfrm>
+            <a:off x="713232" y="1828800"/>
+            <a:ext cx="10424160" cy="548640"/>
+          </a:xfrm>
+          <a:prstGeom prst="rect">
+            <a:avLst/>
+          </a:prstGeom>
+          <a:noFill/>
+        </p:spPr>
+        <p:txBody>
+          <a:bodyPr wrap="none">
+            <a:spAutoFit/>
+          </a:bodyPr>
+          <a:lstStyle/>
+          <a:p>
+            <a:pPr>
+              <a:defRPr sz="1800">
+                <a:solidFill>
+                  <a:srgbClr val="60537D"/>
+                </a:solidFill>
+                <a:latin typeface="Arial"/>
+              </a:defRPr>
+            </a:pPr>
+            <a:r>
+              <a:t>The investor appendix reflects the product available today.</a:t>
+            </a:r>
+          </a:p>
+        </p:txBody>
+      </p:sp>
+      <p:sp>
+        <p:nvSpPr>
+          <p:cNvPr id="6" name="Rounded Rectangle 5"/>
+          <p:cNvSpPr/>
+          <p:nvPr/>
+        </p:nvSpPr>
+        <p:spPr>
+          <a:xfrm>
+            <a:off x="685800" y="2606040"/>
+            <a:ext cx="5257800" cy="1234440"/>
+          </a:xfrm>
+          <a:prstGeom prst="roundRect">
+            <a:avLst/>
+          </a:prstGeom>
+          <a:solidFill>
+            <a:srgbClr val="FFFFFF"/>
+          </a:solidFill>
+          <a:ln>
+            <a:solidFill>
+              <a:srgbClr val="E1D8EF"/>
+            </a:solidFill>
+          </a:ln>
+        </p:spPr>
+        <p:style>
+          <a:lnRef idx="1">
+            <a:schemeClr val="accent1"/>
+          </a:lnRef>
+          <a:fillRef idx="3">
+            <a:schemeClr val="accent1"/>
+          </a:fillRef>
+          <a:effectRef idx="2">
+            <a:schemeClr val="accent1"/>
+          </a:effectRef>
+          <a:fontRef idx="minor">
+            <a:schemeClr val="lt1"/>
+          </a:fontRef>
+        </p:style>
+        <p:txBody>
+          <a:bodyPr rtlCol="0" anchor="ctr" lIns="219456" rIns="182880" tIns="146304"/>
+          <a:lstStyle/>
+          <a:p>
+            <a:pPr algn="ctr">
+              <a:defRPr sz="1700" b="1">
+                <a:solidFill>
+                  <a:srgbClr val="483070"/>
+                </a:solidFill>
+                <a:latin typeface="Arial"/>
+              </a:defRPr>
+            </a:pPr>
+            <a:r>
+              <a:t>Action, not just advice</a:t>
+            </a:r>
+          </a:p>
+          <a:p>
+            <a:pPr>
+              <a:defRPr sz="1200">
+                <a:solidFill>
+                  <a:srgbClr val="60537D"/>
+                </a:solidFill>
+                <a:latin typeface="Arial"/>
+              </a:defRPr>
+            </a:pPr>
+            <a:r>
+              <a:t>Flow can move, simplify, split or complete a task after explicit approval.</a:t>
+            </a:r>
+          </a:p>
+        </p:txBody>
+      </p:sp>
+      <p:sp>
+        <p:nvSpPr>
+          <p:cNvPr id="7" name="Rounded Rectangle 6"/>
+          <p:cNvSpPr/>
+          <p:nvPr/>
+        </p:nvSpPr>
+        <p:spPr>
+          <a:xfrm>
+            <a:off x="685800" y="4069080"/>
+            <a:ext cx="5257800" cy="1234440"/>
+          </a:xfrm>
+          <a:prstGeom prst="roundRect">
+            <a:avLst/>
+          </a:prstGeom>
+          <a:solidFill>
+            <a:srgbClr val="FFFFFF"/>
+          </a:solidFill>
+          <a:ln>
+            <a:solidFill>
+              <a:srgbClr val="E1D8EF"/>
+            </a:solidFill>
+          </a:ln>
+        </p:spPr>
+        <p:style>
+          <a:lnRef idx="1">
+            <a:schemeClr val="accent1"/>
+          </a:lnRef>
+          <a:fillRef idx="3">
+            <a:schemeClr val="accent1"/>
+          </a:fillRef>
+          <a:effectRef idx="2">
+            <a:schemeClr val="accent1"/>
+          </a:effectRef>
+          <a:fontRef idx="minor">
+            <a:schemeClr val="lt1"/>
+          </a:fontRef>
+        </p:style>
+        <p:txBody>
+          <a:bodyPr rtlCol="0" anchor="ctr" lIns="219456" rIns="182880" tIns="146304"/>
+          <a:lstStyle/>
+          <a:p>
+            <a:pPr algn="ctr">
+              <a:defRPr sz="1700" b="1">
+                <a:solidFill>
+                  <a:srgbClr val="483070"/>
+                </a:solidFill>
+                <a:latin typeface="Arial"/>
+              </a:defRPr>
+            </a:pPr>
+            <a:r>
+              <a:t>Calendar in both directions</a:t>
+            </a:r>
+          </a:p>
+          <a:p>
+            <a:pPr>
+              <a:defRPr sz="1200">
+                <a:solidFill>
+                  <a:srgbClr val="60537D"/>
+                </a:solidFill>
+                <a:latin typeface="Arial"/>
+              </a:defRPr>
+            </a:pPr>
+            <a:r>
+              <a:t>Connect Google Calendar or Outlook and sync without duplicate events.</a:t>
+            </a:r>
+          </a:p>
+        </p:txBody>
+      </p:sp>
+      <p:sp>
+        <p:nvSpPr>
+          <p:cNvPr id="8" name="Rounded Rectangle 7"/>
+          <p:cNvSpPr/>
+          <p:nvPr/>
+        </p:nvSpPr>
+        <p:spPr>
+          <a:xfrm>
+            <a:off x="685800" y="2606040"/>
+            <a:ext cx="5257800" cy="1234440"/>
+          </a:xfrm>
+          <a:prstGeom prst="roundRect">
+            <a:avLst/>
+          </a:prstGeom>
+          <a:solidFill>
+            <a:srgbClr val="FFFFFF"/>
+          </a:solidFill>
+          <a:ln>
+            <a:solidFill>
+              <a:srgbClr val="E1D8EF"/>
+            </a:solidFill>
+          </a:ln>
+        </p:spPr>
+        <p:style>
+          <a:lnRef idx="1">
+            <a:schemeClr val="accent1"/>
+          </a:lnRef>
+          <a:fillRef idx="3">
+            <a:schemeClr val="accent1"/>
+          </a:fillRef>
+          <a:effectRef idx="2">
+            <a:schemeClr val="accent1"/>
+          </a:effectRef>
+          <a:fontRef idx="minor">
+            <a:schemeClr val="lt1"/>
+          </a:fontRef>
+        </p:style>
+        <p:txBody>
+          <a:bodyPr rtlCol="0" anchor="ctr" lIns="219456" rIns="182880" tIns="146304"/>
+          <a:lstStyle/>
+          <a:p>
+            <a:pPr algn="ctr">
+              <a:defRPr sz="1700" b="1">
+                <a:solidFill>
+                  <a:srgbClr val="483070"/>
+                </a:solidFill>
+                <a:latin typeface="Arial"/>
+              </a:defRPr>
+            </a:pPr>
+            <a:r>
+              <a:t>Continuity</a:t>
+            </a:r>
+          </a:p>
+          <a:p>
+            <a:pPr>
+              <a:defRPr sz="1200">
+                <a:solidFill>
+                  <a:srgbClr val="60537D"/>
+                </a:solidFill>
+                <a:latin typeface="Arial"/>
+              </a:defRPr>
+            </a:pPr>
+            <a:r>
+              <a:t>Saved Flow conversations resume where the user left off.</a:t>
             </a:r>
           </a:p>
         </p:txBody>
@@ -9406,7 +9788,7 @@
               </a:defRPr>
             </a:pPr>
             <a:r>
-              <a:t>A working web application in use today.</a:t>
+              <a:t>A working web application, now packaged for Android testing.</a:t>
             </a:r>
           </a:p>
         </p:txBody>
@@ -10010,7 +10392,7 @@
               </a:defRPr>
             </a:pPr>
             <a:r>
-              <a:t>Complex underneath. Deliberately simple on the surface.</a:t>
+              <a:t>Complex underneath. Deliberately simple on the surface. Google and Outlook calendar sync included.</a:t>
             </a:r>
           </a:p>
         </p:txBody>
